--- a/public/fun/pack/pptx/birthday/돌잔치_14_감사인사중심_장마철우산.pptx
+++ b/public/fun/pack/pptx/birthday/돌잔치_14_감사인사중심_장마철우산.pptx
@@ -3347,7 +3347,7 @@
             <a:r>
               <a:rPr sz="4000" b="1" i="0">
                 <a:solidFill>
-                  <a:srgbClr val="19294D"/>
+                  <a:srgbClr val="11285F"/>
                 </a:solidFill>
               </a:rPr>
               <a:t>첫 번째 생일</a:t>
@@ -3385,7 +3385,7 @@
             <a:r>
               <a:rPr sz="1700" b="0" i="1">
                 <a:solidFill>
-                  <a:srgbClr val="19294D"/>
+                  <a:srgbClr val="11285F"/>
                 </a:solidFill>
               </a:rPr>
               <a:t>오셔서 같이 밥 한 끼 해 주세요</a:t>
@@ -3460,7 +3460,7 @@
     <p:bg>
       <p:bgPr>
         <a:solidFill>
-          <a:srgbClr val="F0F3FA"/>
+          <a:srgbClr val="EEF2FC"/>
         </a:solidFill>
         <a:effectLst/>
       </p:bgPr>
@@ -3487,7 +3487,7 @@
             <a:avLst/>
           </a:prstGeom>
           <a:solidFill>
-            <a:srgbClr val="335299"/>
+            <a:srgbClr val="2655C5"/>
           </a:solidFill>
           <a:ln>
             <a:noFill/>
@@ -3516,7 +3516,7 @@
             <a:avLst/>
           </a:prstGeom>
           <a:solidFill>
-            <a:srgbClr val="914C3B"/>
+            <a:srgbClr val="209DB6"/>
           </a:solidFill>
           <a:ln>
             <a:noFill/>
@@ -3560,7 +3560,7 @@
             <a:r>
               <a:rPr sz="3000" b="1" i="0">
                 <a:solidFill>
-                  <a:srgbClr val="19294D"/>
+                  <a:srgbClr val="11285F"/>
                 </a:solidFill>
               </a:rPr>
               <a:t>우리 아기를 소개합니다</a:t>
@@ -3585,11 +3585,11 @@
             </a:avLst>
           </a:prstGeom>
           <a:solidFill>
-            <a:srgbClr val="D0DAF1"/>
+            <a:srgbClr val="D1DDFA"/>
           </a:solidFill>
           <a:ln w="19050">
             <a:solidFill>
-              <a:srgbClr val="335299"/>
+              <a:srgbClr val="2655C5"/>
             </a:solidFill>
             <a:prstDash val="dash"/>
           </a:ln>
@@ -3608,7 +3608,7 @@
             <a:r>
               <a:rPr sz="1400" b="0" i="0">
                 <a:solidFill>
-                  <a:srgbClr val="19294D"/>
+                  <a:srgbClr val="11285F"/>
                 </a:solidFill>
               </a:rPr>
               <a:t>아기 사진을 넣어 주세요</a:t>
@@ -3648,7 +3648,7 @@
                       <a:r>
                         <a:rPr sz="1500" b="1">
                           <a:solidFill>
-                            <a:srgbClr val="19294D"/>
+                            <a:srgbClr val="11285F"/>
                           </a:solidFill>
                         </a:rPr>
                         <a:t>이름</a:t>
@@ -3658,30 +3658,30 @@
                   <a:tcPr anchor="ctr" marL="73152" marR="73152">
                     <a:lnL w="9525" cap="flat" cmpd="sng" algn="ctr">
                       <a:solidFill>
-                        <a:srgbClr val="D0DAF1"/>
+                        <a:srgbClr val="D1DDFA"/>
                       </a:solidFill>
                       <a:prstDash val="solid"/>
                     </a:lnL>
                     <a:lnR w="9525" cap="flat" cmpd="sng" algn="ctr">
                       <a:solidFill>
-                        <a:srgbClr val="D0DAF1"/>
+                        <a:srgbClr val="D1DDFA"/>
                       </a:solidFill>
                       <a:prstDash val="solid"/>
                     </a:lnR>
                     <a:lnT w="9525" cap="flat" cmpd="sng" algn="ctr">
                       <a:solidFill>
-                        <a:srgbClr val="D0DAF1"/>
+                        <a:srgbClr val="D1DDFA"/>
                       </a:solidFill>
                       <a:prstDash val="solid"/>
                     </a:lnT>
                     <a:lnB w="9525" cap="flat" cmpd="sng" algn="ctr">
                       <a:solidFill>
-                        <a:srgbClr val="D0DAF1"/>
+                        <a:srgbClr val="D1DDFA"/>
                       </a:solidFill>
                       <a:prstDash val="solid"/>
                     </a:lnB>
                     <a:solidFill>
-                      <a:srgbClr val="D0DAF1"/>
+                      <a:srgbClr val="D1DDFA"/>
                     </a:solidFill>
                   </a:tcPr>
                 </a:tc>
@@ -3704,30 +3704,30 @@
                   <a:tcPr anchor="ctr" marL="73152" marR="73152">
                     <a:lnL w="9525" cap="flat" cmpd="sng" algn="ctr">
                       <a:solidFill>
-                        <a:srgbClr val="D0DAF1"/>
+                        <a:srgbClr val="D1DDFA"/>
                       </a:solidFill>
                       <a:prstDash val="solid"/>
                     </a:lnL>
                     <a:lnR w="9525" cap="flat" cmpd="sng" algn="ctr">
                       <a:solidFill>
-                        <a:srgbClr val="D0DAF1"/>
+                        <a:srgbClr val="D1DDFA"/>
                       </a:solidFill>
                       <a:prstDash val="solid"/>
                     </a:lnR>
                     <a:lnT w="9525" cap="flat" cmpd="sng" algn="ctr">
                       <a:solidFill>
-                        <a:srgbClr val="D0DAF1"/>
+                        <a:srgbClr val="D1DDFA"/>
                       </a:solidFill>
                       <a:prstDash val="solid"/>
                     </a:lnT>
                     <a:lnB w="9525" cap="flat" cmpd="sng" algn="ctr">
                       <a:solidFill>
-                        <a:srgbClr val="D0DAF1"/>
+                        <a:srgbClr val="D1DDFA"/>
                       </a:solidFill>
                       <a:prstDash val="solid"/>
                     </a:lnB>
                     <a:solidFill>
-                      <a:srgbClr val="F0F3FA"/>
+                      <a:srgbClr val="EEF2FC"/>
                     </a:solidFill>
                   </a:tcPr>
                 </a:tc>
@@ -3742,7 +3742,7 @@
                       <a:r>
                         <a:rPr sz="1500" b="1">
                           <a:solidFill>
-                            <a:srgbClr val="19294D"/>
+                            <a:srgbClr val="11285F"/>
                           </a:solidFill>
                         </a:rPr>
                         <a:t>생일</a:t>
@@ -3752,30 +3752,30 @@
                   <a:tcPr anchor="ctr" marL="73152" marR="73152">
                     <a:lnL w="9525" cap="flat" cmpd="sng" algn="ctr">
                       <a:solidFill>
-                        <a:srgbClr val="D0DAF1"/>
+                        <a:srgbClr val="D1DDFA"/>
                       </a:solidFill>
                       <a:prstDash val="solid"/>
                     </a:lnL>
                     <a:lnR w="9525" cap="flat" cmpd="sng" algn="ctr">
                       <a:solidFill>
-                        <a:srgbClr val="D0DAF1"/>
+                        <a:srgbClr val="D1DDFA"/>
                       </a:solidFill>
                       <a:prstDash val="solid"/>
                     </a:lnR>
                     <a:lnT w="9525" cap="flat" cmpd="sng" algn="ctr">
                       <a:solidFill>
-                        <a:srgbClr val="D0DAF1"/>
+                        <a:srgbClr val="D1DDFA"/>
                       </a:solidFill>
                       <a:prstDash val="solid"/>
                     </a:lnT>
                     <a:lnB w="9525" cap="flat" cmpd="sng" algn="ctr">
                       <a:solidFill>
-                        <a:srgbClr val="D0DAF1"/>
+                        <a:srgbClr val="D1DDFA"/>
                       </a:solidFill>
                       <a:prstDash val="solid"/>
                     </a:lnB>
                     <a:solidFill>
-                      <a:srgbClr val="D0DAF1"/>
+                      <a:srgbClr val="D1DDFA"/>
                     </a:solidFill>
                   </a:tcPr>
                 </a:tc>
@@ -3798,25 +3798,25 @@
                   <a:tcPr anchor="ctr" marL="73152" marR="73152">
                     <a:lnL w="9525" cap="flat" cmpd="sng" algn="ctr">
                       <a:solidFill>
-                        <a:srgbClr val="D0DAF1"/>
+                        <a:srgbClr val="D1DDFA"/>
                       </a:solidFill>
                       <a:prstDash val="solid"/>
                     </a:lnL>
                     <a:lnR w="9525" cap="flat" cmpd="sng" algn="ctr">
                       <a:solidFill>
-                        <a:srgbClr val="D0DAF1"/>
+                        <a:srgbClr val="D1DDFA"/>
                       </a:solidFill>
                       <a:prstDash val="solid"/>
                     </a:lnR>
                     <a:lnT w="9525" cap="flat" cmpd="sng" algn="ctr">
                       <a:solidFill>
-                        <a:srgbClr val="D0DAF1"/>
+                        <a:srgbClr val="D1DDFA"/>
                       </a:solidFill>
                       <a:prstDash val="solid"/>
                     </a:lnT>
                     <a:lnB w="9525" cap="flat" cmpd="sng" algn="ctr">
                       <a:solidFill>
-                        <a:srgbClr val="D0DAF1"/>
+                        <a:srgbClr val="D1DDFA"/>
                       </a:solidFill>
                       <a:prstDash val="solid"/>
                     </a:lnB>
@@ -3836,7 +3836,7 @@
                       <a:r>
                         <a:rPr sz="1500" b="1">
                           <a:solidFill>
-                            <a:srgbClr val="19294D"/>
+                            <a:srgbClr val="11285F"/>
                           </a:solidFill>
                         </a:rPr>
                         <a:t>키 · 몸무게</a:t>
@@ -3846,30 +3846,30 @@
                   <a:tcPr anchor="ctr" marL="73152" marR="73152">
                     <a:lnL w="9525" cap="flat" cmpd="sng" algn="ctr">
                       <a:solidFill>
-                        <a:srgbClr val="D0DAF1"/>
+                        <a:srgbClr val="D1DDFA"/>
                       </a:solidFill>
                       <a:prstDash val="solid"/>
                     </a:lnL>
                     <a:lnR w="9525" cap="flat" cmpd="sng" algn="ctr">
                       <a:solidFill>
-                        <a:srgbClr val="D0DAF1"/>
+                        <a:srgbClr val="D1DDFA"/>
                       </a:solidFill>
                       <a:prstDash val="solid"/>
                     </a:lnR>
                     <a:lnT w="9525" cap="flat" cmpd="sng" algn="ctr">
                       <a:solidFill>
-                        <a:srgbClr val="D0DAF1"/>
+                        <a:srgbClr val="D1DDFA"/>
                       </a:solidFill>
                       <a:prstDash val="solid"/>
                     </a:lnT>
                     <a:lnB w="9525" cap="flat" cmpd="sng" algn="ctr">
                       <a:solidFill>
-                        <a:srgbClr val="D0DAF1"/>
+                        <a:srgbClr val="D1DDFA"/>
                       </a:solidFill>
                       <a:prstDash val="solid"/>
                     </a:lnB>
                     <a:solidFill>
-                      <a:srgbClr val="D0DAF1"/>
+                      <a:srgbClr val="D1DDFA"/>
                     </a:solidFill>
                   </a:tcPr>
                 </a:tc>
@@ -3892,30 +3892,30 @@
                   <a:tcPr anchor="ctr" marL="73152" marR="73152">
                     <a:lnL w="9525" cap="flat" cmpd="sng" algn="ctr">
                       <a:solidFill>
-                        <a:srgbClr val="D0DAF1"/>
+                        <a:srgbClr val="D1DDFA"/>
                       </a:solidFill>
                       <a:prstDash val="solid"/>
                     </a:lnL>
                     <a:lnR w="9525" cap="flat" cmpd="sng" algn="ctr">
                       <a:solidFill>
-                        <a:srgbClr val="D0DAF1"/>
+                        <a:srgbClr val="D1DDFA"/>
                       </a:solidFill>
                       <a:prstDash val="solid"/>
                     </a:lnR>
                     <a:lnT w="9525" cap="flat" cmpd="sng" algn="ctr">
                       <a:solidFill>
-                        <a:srgbClr val="D0DAF1"/>
+                        <a:srgbClr val="D1DDFA"/>
                       </a:solidFill>
                       <a:prstDash val="solid"/>
                     </a:lnT>
                     <a:lnB w="9525" cap="flat" cmpd="sng" algn="ctr">
                       <a:solidFill>
-                        <a:srgbClr val="D0DAF1"/>
+                        <a:srgbClr val="D1DDFA"/>
                       </a:solidFill>
                       <a:prstDash val="solid"/>
                     </a:lnB>
                     <a:solidFill>
-                      <a:srgbClr val="F0F3FA"/>
+                      <a:srgbClr val="EEF2FC"/>
                     </a:solidFill>
                   </a:tcPr>
                 </a:tc>
@@ -3930,7 +3930,7 @@
                       <a:r>
                         <a:rPr sz="1500" b="1">
                           <a:solidFill>
-                            <a:srgbClr val="19294D"/>
+                            <a:srgbClr val="11285F"/>
                           </a:solidFill>
                         </a:rPr>
                         <a:t>좋아하는 것</a:t>
@@ -3940,30 +3940,30 @@
                   <a:tcPr anchor="ctr" marL="73152" marR="73152">
                     <a:lnL w="9525" cap="flat" cmpd="sng" algn="ctr">
                       <a:solidFill>
-                        <a:srgbClr val="D0DAF1"/>
+                        <a:srgbClr val="D1DDFA"/>
                       </a:solidFill>
                       <a:prstDash val="solid"/>
                     </a:lnL>
                     <a:lnR w="9525" cap="flat" cmpd="sng" algn="ctr">
                       <a:solidFill>
-                        <a:srgbClr val="D0DAF1"/>
+                        <a:srgbClr val="D1DDFA"/>
                       </a:solidFill>
                       <a:prstDash val="solid"/>
                     </a:lnR>
                     <a:lnT w="9525" cap="flat" cmpd="sng" algn="ctr">
                       <a:solidFill>
-                        <a:srgbClr val="D0DAF1"/>
+                        <a:srgbClr val="D1DDFA"/>
                       </a:solidFill>
                       <a:prstDash val="solid"/>
                     </a:lnT>
                     <a:lnB w="9525" cap="flat" cmpd="sng" algn="ctr">
                       <a:solidFill>
-                        <a:srgbClr val="D0DAF1"/>
+                        <a:srgbClr val="D1DDFA"/>
                       </a:solidFill>
                       <a:prstDash val="solid"/>
                     </a:lnB>
                     <a:solidFill>
-                      <a:srgbClr val="D0DAF1"/>
+                      <a:srgbClr val="D1DDFA"/>
                     </a:solidFill>
                   </a:tcPr>
                 </a:tc>
@@ -3986,25 +3986,25 @@
                   <a:tcPr anchor="ctr" marL="73152" marR="73152">
                     <a:lnL w="9525" cap="flat" cmpd="sng" algn="ctr">
                       <a:solidFill>
-                        <a:srgbClr val="D0DAF1"/>
+                        <a:srgbClr val="D1DDFA"/>
                       </a:solidFill>
                       <a:prstDash val="solid"/>
                     </a:lnL>
                     <a:lnR w="9525" cap="flat" cmpd="sng" algn="ctr">
                       <a:solidFill>
-                        <a:srgbClr val="D0DAF1"/>
+                        <a:srgbClr val="D1DDFA"/>
                       </a:solidFill>
                       <a:prstDash val="solid"/>
                     </a:lnR>
                     <a:lnT w="9525" cap="flat" cmpd="sng" algn="ctr">
                       <a:solidFill>
-                        <a:srgbClr val="D0DAF1"/>
+                        <a:srgbClr val="D1DDFA"/>
                       </a:solidFill>
                       <a:prstDash val="solid"/>
                     </a:lnT>
                     <a:lnB w="9525" cap="flat" cmpd="sng" algn="ctr">
                       <a:solidFill>
-                        <a:srgbClr val="D0DAF1"/>
+                        <a:srgbClr val="D1DDFA"/>
                       </a:solidFill>
                       <a:prstDash val="solid"/>
                     </a:lnB>
@@ -4024,7 +4024,7 @@
                       <a:r>
                         <a:rPr sz="1500" b="1">
                           <a:solidFill>
-                            <a:srgbClr val="19294D"/>
+                            <a:srgbClr val="11285F"/>
                           </a:solidFill>
                         </a:rPr>
                         <a:t>별명</a:t>
@@ -4034,30 +4034,30 @@
                   <a:tcPr anchor="ctr" marL="73152" marR="73152">
                     <a:lnL w="9525" cap="flat" cmpd="sng" algn="ctr">
                       <a:solidFill>
-                        <a:srgbClr val="D0DAF1"/>
+                        <a:srgbClr val="D1DDFA"/>
                       </a:solidFill>
                       <a:prstDash val="solid"/>
                     </a:lnL>
                     <a:lnR w="9525" cap="flat" cmpd="sng" algn="ctr">
                       <a:solidFill>
-                        <a:srgbClr val="D0DAF1"/>
+                        <a:srgbClr val="D1DDFA"/>
                       </a:solidFill>
                       <a:prstDash val="solid"/>
                     </a:lnR>
                     <a:lnT w="9525" cap="flat" cmpd="sng" algn="ctr">
                       <a:solidFill>
-                        <a:srgbClr val="D0DAF1"/>
+                        <a:srgbClr val="D1DDFA"/>
                       </a:solidFill>
                       <a:prstDash val="solid"/>
                     </a:lnT>
                     <a:lnB w="9525" cap="flat" cmpd="sng" algn="ctr">
                       <a:solidFill>
-                        <a:srgbClr val="D0DAF1"/>
+                        <a:srgbClr val="D1DDFA"/>
                       </a:solidFill>
                       <a:prstDash val="solid"/>
                     </a:lnB>
                     <a:solidFill>
-                      <a:srgbClr val="D0DAF1"/>
+                      <a:srgbClr val="D1DDFA"/>
                     </a:solidFill>
                   </a:tcPr>
                 </a:tc>
@@ -4080,30 +4080,30 @@
                   <a:tcPr anchor="ctr" marL="73152" marR="73152">
                     <a:lnL w="9525" cap="flat" cmpd="sng" algn="ctr">
                       <a:solidFill>
-                        <a:srgbClr val="D0DAF1"/>
+                        <a:srgbClr val="D1DDFA"/>
                       </a:solidFill>
                       <a:prstDash val="solid"/>
                     </a:lnL>
                     <a:lnR w="9525" cap="flat" cmpd="sng" algn="ctr">
                       <a:solidFill>
-                        <a:srgbClr val="D0DAF1"/>
+                        <a:srgbClr val="D1DDFA"/>
                       </a:solidFill>
                       <a:prstDash val="solid"/>
                     </a:lnR>
                     <a:lnT w="9525" cap="flat" cmpd="sng" algn="ctr">
                       <a:solidFill>
-                        <a:srgbClr val="D0DAF1"/>
+                        <a:srgbClr val="D1DDFA"/>
                       </a:solidFill>
                       <a:prstDash val="solid"/>
                     </a:lnT>
                     <a:lnB w="9525" cap="flat" cmpd="sng" algn="ctr">
                       <a:solidFill>
-                        <a:srgbClr val="D0DAF1"/>
+                        <a:srgbClr val="D1DDFA"/>
                       </a:solidFill>
                       <a:prstDash val="solid"/>
                     </a:lnB>
                     <a:solidFill>
-                      <a:srgbClr val="F0F3FA"/>
+                      <a:srgbClr val="EEF2FC"/>
                     </a:solidFill>
                   </a:tcPr>
                 </a:tc>
@@ -4118,7 +4118,7 @@
                       <a:r>
                         <a:rPr sz="1500" b="1">
                           <a:solidFill>
-                            <a:srgbClr val="19294D"/>
+                            <a:srgbClr val="11285F"/>
                           </a:solidFill>
                         </a:rPr>
                         <a:t>부모의 마음</a:t>
@@ -4128,30 +4128,30 @@
                   <a:tcPr anchor="ctr" marL="73152" marR="73152">
                     <a:lnL w="9525" cap="flat" cmpd="sng" algn="ctr">
                       <a:solidFill>
-                        <a:srgbClr val="D0DAF1"/>
+                        <a:srgbClr val="D1DDFA"/>
                       </a:solidFill>
                       <a:prstDash val="solid"/>
                     </a:lnL>
                     <a:lnR w="9525" cap="flat" cmpd="sng" algn="ctr">
                       <a:solidFill>
-                        <a:srgbClr val="D0DAF1"/>
+                        <a:srgbClr val="D1DDFA"/>
                       </a:solidFill>
                       <a:prstDash val="solid"/>
                     </a:lnR>
                     <a:lnT w="9525" cap="flat" cmpd="sng" algn="ctr">
                       <a:solidFill>
-                        <a:srgbClr val="D0DAF1"/>
+                        <a:srgbClr val="D1DDFA"/>
                       </a:solidFill>
                       <a:prstDash val="solid"/>
                     </a:lnT>
                     <a:lnB w="9525" cap="flat" cmpd="sng" algn="ctr">
                       <a:solidFill>
-                        <a:srgbClr val="D0DAF1"/>
+                        <a:srgbClr val="D1DDFA"/>
                       </a:solidFill>
                       <a:prstDash val="solid"/>
                     </a:lnB>
                     <a:solidFill>
-                      <a:srgbClr val="D0DAF1"/>
+                      <a:srgbClr val="D1DDFA"/>
                     </a:solidFill>
                   </a:tcPr>
                 </a:tc>
@@ -4174,25 +4174,25 @@
                   <a:tcPr anchor="ctr" marL="73152" marR="73152">
                     <a:lnL w="9525" cap="flat" cmpd="sng" algn="ctr">
                       <a:solidFill>
-                        <a:srgbClr val="D0DAF1"/>
+                        <a:srgbClr val="D1DDFA"/>
                       </a:solidFill>
                       <a:prstDash val="solid"/>
                     </a:lnL>
                     <a:lnR w="9525" cap="flat" cmpd="sng" algn="ctr">
                       <a:solidFill>
-                        <a:srgbClr val="D0DAF1"/>
+                        <a:srgbClr val="D1DDFA"/>
                       </a:solidFill>
                       <a:prstDash val="solid"/>
                     </a:lnR>
                     <a:lnT w="9525" cap="flat" cmpd="sng" algn="ctr">
                       <a:solidFill>
-                        <a:srgbClr val="D0DAF1"/>
+                        <a:srgbClr val="D1DDFA"/>
                       </a:solidFill>
                       <a:prstDash val="solid"/>
                     </a:lnT>
                     <a:lnB w="9525" cap="flat" cmpd="sng" algn="ctr">
                       <a:solidFill>
-                        <a:srgbClr val="D0DAF1"/>
+                        <a:srgbClr val="D1DDFA"/>
                       </a:solidFill>
                       <a:prstDash val="solid"/>
                     </a:lnB>
@@ -4220,7 +4220,7 @@
     <p:bg>
       <p:bgPr>
         <a:solidFill>
-          <a:srgbClr val="F0F3FA"/>
+          <a:srgbClr val="EEF2FC"/>
         </a:solidFill>
         <a:effectLst/>
       </p:bgPr>
@@ -4247,7 +4247,7 @@
             <a:avLst/>
           </a:prstGeom>
           <a:solidFill>
-            <a:srgbClr val="335299"/>
+            <a:srgbClr val="2655C5"/>
           </a:solidFill>
           <a:ln>
             <a:noFill/>
@@ -4276,7 +4276,7 @@
             <a:avLst/>
           </a:prstGeom>
           <a:solidFill>
-            <a:srgbClr val="914C3B"/>
+            <a:srgbClr val="209DB6"/>
           </a:solidFill>
           <a:ln>
             <a:noFill/>
@@ -4320,7 +4320,7 @@
             <a:r>
               <a:rPr sz="3000" b="1" i="0">
                 <a:solidFill>
-                  <a:srgbClr val="19294D"/>
+                  <a:srgbClr val="11285F"/>
                 </a:solidFill>
               </a:rPr>
               <a:t>초대합니다</a:t>
@@ -4345,11 +4345,11 @@
             </a:avLst>
           </a:prstGeom>
           <a:solidFill>
-            <a:srgbClr val="F0F3FA"/>
+            <a:srgbClr val="EEF2FC"/>
           </a:solidFill>
           <a:ln w="12700">
             <a:solidFill>
-              <a:srgbClr val="D0DAF1"/>
+              <a:srgbClr val="D1DDFA"/>
             </a:solidFill>
           </a:ln>
         </p:spPr>
@@ -4473,7 +4473,7 @@
     <p:bg>
       <p:bgPr>
         <a:solidFill>
-          <a:srgbClr val="F0F3FA"/>
+          <a:srgbClr val="EEF2FC"/>
         </a:solidFill>
         <a:effectLst/>
       </p:bgPr>
@@ -4500,7 +4500,7 @@
             <a:avLst/>
           </a:prstGeom>
           <a:solidFill>
-            <a:srgbClr val="335299"/>
+            <a:srgbClr val="2655C5"/>
           </a:solidFill>
           <a:ln>
             <a:noFill/>
@@ -4529,7 +4529,7 @@
             <a:avLst/>
           </a:prstGeom>
           <a:solidFill>
-            <a:srgbClr val="914C3B"/>
+            <a:srgbClr val="209DB6"/>
           </a:solidFill>
           <a:ln>
             <a:noFill/>
@@ -4573,7 +4573,7 @@
             <a:r>
               <a:rPr sz="3000" b="1" i="0">
                 <a:solidFill>
-                  <a:srgbClr val="19294D"/>
+                  <a:srgbClr val="11285F"/>
                 </a:solidFill>
               </a:rPr>
               <a:t>부모의 한마디</a:t>
@@ -4598,11 +4598,11 @@
             </a:avLst>
           </a:prstGeom>
           <a:solidFill>
-            <a:srgbClr val="D0DAF1"/>
+            <a:srgbClr val="D1DDFA"/>
           </a:solidFill>
           <a:ln w="12700">
             <a:solidFill>
-              <a:srgbClr val="335299"/>
+              <a:srgbClr val="2655C5"/>
             </a:solidFill>
           </a:ln>
         </p:spPr>
@@ -4726,7 +4726,7 @@
     <p:bg>
       <p:bgPr>
         <a:solidFill>
-          <a:srgbClr val="F0F3FA"/>
+          <a:srgbClr val="EEF2FC"/>
         </a:solidFill>
         <a:effectLst/>
       </p:bgPr>
@@ -4753,7 +4753,7 @@
             <a:avLst/>
           </a:prstGeom>
           <a:solidFill>
-            <a:srgbClr val="335299"/>
+            <a:srgbClr val="2655C5"/>
           </a:solidFill>
           <a:ln>
             <a:noFill/>
@@ -4782,7 +4782,7 @@
             <a:avLst/>
           </a:prstGeom>
           <a:solidFill>
-            <a:srgbClr val="914C3B"/>
+            <a:srgbClr val="209DB6"/>
           </a:solidFill>
           <a:ln>
             <a:noFill/>
@@ -4826,7 +4826,7 @@
             <a:r>
               <a:rPr sz="3000" b="1" i="0">
                 <a:solidFill>
-                  <a:srgbClr val="19294D"/>
+                  <a:srgbClr val="11285F"/>
                 </a:solidFill>
               </a:rPr>
               <a:t>사진 모음</a:t>
@@ -4851,11 +4851,11 @@
             </a:avLst>
           </a:prstGeom>
           <a:solidFill>
-            <a:srgbClr val="D0DAF1"/>
+            <a:srgbClr val="D1DDFA"/>
           </a:solidFill>
           <a:ln w="19050">
             <a:solidFill>
-              <a:srgbClr val="335299"/>
+              <a:srgbClr val="2655C5"/>
             </a:solidFill>
             <a:prstDash val="dash"/>
           </a:ln>
@@ -4874,7 +4874,7 @@
             <a:r>
               <a:rPr sz="1200" b="0" i="0">
                 <a:solidFill>
-                  <a:srgbClr val="19294D"/>
+                  <a:srgbClr val="11285F"/>
                 </a:solidFill>
               </a:rPr>
               <a:t>사진 1</a:t>
@@ -4899,11 +4899,11 @@
             </a:avLst>
           </a:prstGeom>
           <a:solidFill>
-            <a:srgbClr val="D0DAF1"/>
+            <a:srgbClr val="D1DDFA"/>
           </a:solidFill>
           <a:ln w="19050">
             <a:solidFill>
-              <a:srgbClr val="335299"/>
+              <a:srgbClr val="2655C5"/>
             </a:solidFill>
             <a:prstDash val="dash"/>
           </a:ln>
@@ -4922,7 +4922,7 @@
             <a:r>
               <a:rPr sz="1200" b="0" i="0">
                 <a:solidFill>
-                  <a:srgbClr val="19294D"/>
+                  <a:srgbClr val="11285F"/>
                 </a:solidFill>
               </a:rPr>
               <a:t>사진 2</a:t>
@@ -4947,11 +4947,11 @@
             </a:avLst>
           </a:prstGeom>
           <a:solidFill>
-            <a:srgbClr val="D0DAF1"/>
+            <a:srgbClr val="D1DDFA"/>
           </a:solidFill>
           <a:ln w="19050">
             <a:solidFill>
-              <a:srgbClr val="335299"/>
+              <a:srgbClr val="2655C5"/>
             </a:solidFill>
             <a:prstDash val="dash"/>
           </a:ln>
@@ -4970,7 +4970,7 @@
             <a:r>
               <a:rPr sz="1200" b="0" i="0">
                 <a:solidFill>
-                  <a:srgbClr val="19294D"/>
+                  <a:srgbClr val="11285F"/>
                 </a:solidFill>
               </a:rPr>
               <a:t>사진 3</a:t>
@@ -4995,11 +4995,11 @@
             </a:avLst>
           </a:prstGeom>
           <a:solidFill>
-            <a:srgbClr val="D0DAF1"/>
+            <a:srgbClr val="D1DDFA"/>
           </a:solidFill>
           <a:ln w="19050">
             <a:solidFill>
-              <a:srgbClr val="335299"/>
+              <a:srgbClr val="2655C5"/>
             </a:solidFill>
             <a:prstDash val="dash"/>
           </a:ln>
@@ -5018,7 +5018,7 @@
             <a:r>
               <a:rPr sz="1200" b="0" i="0">
                 <a:solidFill>
-                  <a:srgbClr val="19294D"/>
+                  <a:srgbClr val="11285F"/>
                 </a:solidFill>
               </a:rPr>
               <a:t>사진 4</a:t>
@@ -5043,11 +5043,11 @@
             </a:avLst>
           </a:prstGeom>
           <a:solidFill>
-            <a:srgbClr val="D0DAF1"/>
+            <a:srgbClr val="D1DDFA"/>
           </a:solidFill>
           <a:ln w="19050">
             <a:solidFill>
-              <a:srgbClr val="335299"/>
+              <a:srgbClr val="2655C5"/>
             </a:solidFill>
             <a:prstDash val="dash"/>
           </a:ln>
@@ -5066,7 +5066,7 @@
             <a:r>
               <a:rPr sz="1200" b="0" i="0">
                 <a:solidFill>
-                  <a:srgbClr val="19294D"/>
+                  <a:srgbClr val="11285F"/>
                 </a:solidFill>
               </a:rPr>
               <a:t>사진 5</a:t>
@@ -5091,11 +5091,11 @@
             </a:avLst>
           </a:prstGeom>
           <a:solidFill>
-            <a:srgbClr val="D0DAF1"/>
+            <a:srgbClr val="D1DDFA"/>
           </a:solidFill>
           <a:ln w="19050">
             <a:solidFill>
-              <a:srgbClr val="335299"/>
+              <a:srgbClr val="2655C5"/>
             </a:solidFill>
             <a:prstDash val="dash"/>
           </a:ln>
@@ -5114,7 +5114,7 @@
             <a:r>
               <a:rPr sz="1200" b="0" i="0">
                 <a:solidFill>
-                  <a:srgbClr val="19294D"/>
+                  <a:srgbClr val="11285F"/>
                 </a:solidFill>
               </a:rPr>
               <a:t>사진 6</a:t>
@@ -5139,11 +5139,11 @@
             </a:avLst>
           </a:prstGeom>
           <a:solidFill>
-            <a:srgbClr val="D0DAF1"/>
+            <a:srgbClr val="D1DDFA"/>
           </a:solidFill>
           <a:ln w="19050">
             <a:solidFill>
-              <a:srgbClr val="335299"/>
+              <a:srgbClr val="2655C5"/>
             </a:solidFill>
             <a:prstDash val="dash"/>
           </a:ln>
@@ -5162,7 +5162,7 @@
             <a:r>
               <a:rPr sz="1200" b="0" i="0">
                 <a:solidFill>
-                  <a:srgbClr val="19294D"/>
+                  <a:srgbClr val="11285F"/>
                 </a:solidFill>
               </a:rPr>
               <a:t>사진 7</a:t>
@@ -5187,11 +5187,11 @@
             </a:avLst>
           </a:prstGeom>
           <a:solidFill>
-            <a:srgbClr val="D0DAF1"/>
+            <a:srgbClr val="D1DDFA"/>
           </a:solidFill>
           <a:ln w="19050">
             <a:solidFill>
-              <a:srgbClr val="335299"/>
+              <a:srgbClr val="2655C5"/>
             </a:solidFill>
             <a:prstDash val="dash"/>
           </a:ln>
@@ -5210,7 +5210,7 @@
             <a:r>
               <a:rPr sz="1200" b="0" i="0">
                 <a:solidFill>
-                  <a:srgbClr val="19294D"/>
+                  <a:srgbClr val="11285F"/>
                 </a:solidFill>
               </a:rPr>
               <a:t>사진 8</a:t>
@@ -5290,7 +5290,7 @@
             <a:r>
               <a:rPr sz="3400" b="1" i="0">
                 <a:solidFill>
-                  <a:srgbClr val="19294D"/>
+                  <a:srgbClr val="11285F"/>
                 </a:solidFill>
               </a:rPr>
               <a:t>와 주셔서 고맙습니다</a:t>
@@ -5328,7 +5328,7 @@
             <a:r>
               <a:rPr sz="1700" b="0" i="1">
                 <a:solidFill>
-                  <a:srgbClr val="19294D"/>
+                  <a:srgbClr val="11285F"/>
                 </a:solidFill>
               </a:rPr>
               <a:t>아이가 한 살이 되었습니다</a:t>
@@ -5393,34 +5393,34 @@
         <a:sysClr val="window" lastClr="FFFFFF"/>
       </a:lt1>
       <a:dk2>
-        <a:srgbClr val="19294D"/>
+        <a:srgbClr val="11285F"/>
       </a:dk2>
       <a:lt2>
-        <a:srgbClr val="F0F3FA"/>
+        <a:srgbClr val="EEF2FC"/>
       </a:lt2>
       <a:accent1>
-        <a:srgbClr val="335299"/>
+        <a:srgbClr val="2655C5"/>
       </a:accent1>
       <a:accent2>
-        <a:srgbClr val="914C3B"/>
+        <a:srgbClr val="209DB6"/>
       </a:accent2>
       <a:accent3>
-        <a:srgbClr val="19294D"/>
+        <a:srgbClr val="11285F"/>
       </a:accent3>
       <a:accent4>
-        <a:srgbClr val="D0DAF1"/>
+        <a:srgbClr val="D1DDFA"/>
       </a:accent4>
       <a:accent5>
-        <a:srgbClr val="624F6A"/>
+        <a:srgbClr val="2379BE"/>
       </a:accent5>
       <a:accent6>
-        <a:srgbClr val="757F94"/>
+        <a:srgbClr val="707E9F"/>
       </a:accent6>
       <a:hlink>
-        <a:srgbClr val="335299"/>
+        <a:srgbClr val="2655C5"/>
       </a:hlink>
       <a:folHlink>
-        <a:srgbClr val="19294D"/>
+        <a:srgbClr val="11285F"/>
       </a:folHlink>
     </a:clrScheme>
     <a:fontScheme name="Office">
